--- a/output/education/2026-03-30_cognitive-bias-diagnostic-reasoning/cognitive-bias-diagnostic-reasoning_slides_residents.pptx
+++ b/output/education/2026-03-30_cognitive-bias-diagnostic-reasoning/cognitive-bias-diagnostic-reasoning_slides_residents.pptx
@@ -3388,42 +3388,6 @@
           </a:p>
         </p:txBody>
       </p:sp>
-      <p:sp>
-        <p:nvSpPr>
-          <p:cNvPr id="9" name="TextBox 8"/>
-          <p:cNvSpPr txBox="1"/>
-          <p:nvPr/>
-        </p:nvSpPr>
-        <p:spPr>
-          <a:xfrm>
-            <a:off x="5943600" y="4663440"/>
-            <a:ext cx="3200400" cy="274320"/>
-          </a:xfrm>
-          <a:prstGeom prst="rect">
-            <a:avLst/>
-          </a:prstGeom>
-          <a:noFill/>
-        </p:spPr>
-        <p:txBody>
-          <a:bodyPr wrap="square" lIns="45720" rIns="45720" tIns="27432" bIns="27432">
-            <a:spAutoFit/>
-          </a:bodyPr>
-          <a:lstStyle/>
-          <a:p>
-            <a:pPr algn="l">
-              <a:defRPr sz="800" b="0">
-                <a:solidFill>
-                  <a:srgbClr val="8A95BA"/>
-                </a:solidFill>
-                <a:latin typeface="Calibri"/>
-              </a:defRPr>
-            </a:pPr>
-            <a:r>
-              <a:t>[ガニェ事象1: 学習者の注意を獲得する]</a:t>
-            </a:r>
-          </a:p>
-        </p:txBody>
-      </p:sp>
     </p:spTree>
   </p:cSld>
   <p:clrMapOvr>
@@ -4122,42 +4086,6 @@
           </a:p>
         </p:txBody>
       </p:sp>
-      <p:sp>
-        <p:nvSpPr>
-          <p:cNvPr id="19" name="TextBox 18"/>
-          <p:cNvSpPr txBox="1"/>
-          <p:nvPr/>
-        </p:nvSpPr>
-        <p:spPr>
-          <a:xfrm>
-            <a:off x="5029200" y="4663440"/>
-            <a:ext cx="4114800" cy="274320"/>
-          </a:xfrm>
-          <a:prstGeom prst="rect">
-            <a:avLst/>
-          </a:prstGeom>
-          <a:noFill/>
-        </p:spPr>
-        <p:txBody>
-          <a:bodyPr wrap="square" lIns="45720" rIns="45720" tIns="27432" bIns="27432">
-            <a:spAutoFit/>
-          </a:bodyPr>
-          <a:lstStyle/>
-          <a:p>
-            <a:pPr algn="l">
-              <a:defRPr sz="800" b="0">
-                <a:solidFill>
-                  <a:srgbClr val="8A95BA"/>
-                </a:solidFill>
-                <a:latin typeface="Calibri"/>
-              </a:defRPr>
-            </a:pPr>
-            <a:r>
-              <a:t>[ガニェ事象8: 学習の評価 / 事象9: 保持と転移を促す]</a:t>
-            </a:r>
-          </a:p>
-        </p:txBody>
-      </p:sp>
     </p:spTree>
   </p:cSld>
   <p:clrMapOvr>
@@ -4652,42 +4580,6 @@
             </a:pPr>
             <a:r>
               <a:t>ブルーム分類: 理解 → 分析 → 創造 | 二重過程理論 × 認知的強制戦略</a:t>
-            </a:r>
-          </a:p>
-        </p:txBody>
-      </p:sp>
-      <p:sp>
-        <p:nvSpPr>
-          <p:cNvPr id="14" name="TextBox 13"/>
-          <p:cNvSpPr txBox="1"/>
-          <p:nvPr/>
-        </p:nvSpPr>
-        <p:spPr>
-          <a:xfrm>
-            <a:off x="6400800" y="4663440"/>
-            <a:ext cx="2743200" cy="274320"/>
-          </a:xfrm>
-          <a:prstGeom prst="rect">
-            <a:avLst/>
-          </a:prstGeom>
-          <a:noFill/>
-        </p:spPr>
-        <p:txBody>
-          <a:bodyPr wrap="square" lIns="45720" rIns="45720" tIns="27432" bIns="27432">
-            <a:spAutoFit/>
-          </a:bodyPr>
-          <a:lstStyle/>
-          <a:p>
-            <a:pPr algn="l">
-              <a:defRPr sz="800" b="0">
-                <a:solidFill>
-                  <a:srgbClr val="8A95BA"/>
-                </a:solidFill>
-                <a:latin typeface="Calibri"/>
-              </a:defRPr>
-            </a:pPr>
-            <a:r>
-              <a:t>[ガニェ事象2: 学習目標を知らせる]</a:t>
             </a:r>
           </a:p>
         </p:txBody>
@@ -5312,7 +5204,7 @@
         </p:nvSpPr>
         <p:spPr>
           <a:xfrm>
-            <a:off x="457200" y="3840480"/>
+            <a:off x="457200" y="4206240"/>
             <a:ext cx="54864" cy="640080"/>
           </a:xfrm>
           <a:prstGeom prst="rect">
@@ -5355,7 +5247,7 @@
         </p:nvSpPr>
         <p:spPr>
           <a:xfrm>
-            <a:off x="566928" y="3840480"/>
+            <a:off x="566928" y="4206240"/>
             <a:ext cx="8119872" cy="640080"/>
           </a:xfrm>
           <a:prstGeom prst="rect">
@@ -5400,7 +5292,7 @@
         </p:nvSpPr>
         <p:spPr>
           <a:xfrm>
-            <a:off x="685800" y="3913632"/>
+            <a:off x="685800" y="4279392"/>
             <a:ext cx="7863840" cy="493775"/>
           </a:xfrm>
           <a:prstGeom prst="rect">
@@ -5428,42 +5320,6 @@
             <a:br/>
             <a:r>
               <a:t>— Enke (2023): 高ステークでもバイアスは縮小するが完全には消えない</a:t>
-            </a:r>
-          </a:p>
-        </p:txBody>
-      </p:sp>
-      <p:sp>
-        <p:nvSpPr>
-          <p:cNvPr id="8" name="TextBox 7"/>
-          <p:cNvSpPr txBox="1"/>
-          <p:nvPr/>
-        </p:nvSpPr>
-        <p:spPr>
-          <a:xfrm>
-            <a:off x="5943600" y="4663440"/>
-            <a:ext cx="3200400" cy="274320"/>
-          </a:xfrm>
-          <a:prstGeom prst="rect">
-            <a:avLst/>
-          </a:prstGeom>
-          <a:noFill/>
-        </p:spPr>
-        <p:txBody>
-          <a:bodyPr wrap="square" lIns="45720" rIns="45720" tIns="27432" bIns="27432">
-            <a:spAutoFit/>
-          </a:bodyPr>
-          <a:lstStyle/>
-          <a:p>
-            <a:pPr algn="l">
-              <a:defRPr sz="800" b="0">
-                <a:solidFill>
-                  <a:srgbClr val="8A95BA"/>
-                </a:solidFill>
-                <a:latin typeface="Calibri"/>
-              </a:defRPr>
-            </a:pPr>
-            <a:r>
-              <a:t>[ガニェ事象3: 前提条件を思い出させる]</a:t>
             </a:r>
           </a:p>
         </p:txBody>
@@ -6071,42 +5927,6 @@
             </a:pPr>
             <a:r>
               <a:t>エラーの構造: 既往歴がアンカーとなり、確認バイアスがそれを強化する複合パターン</a:t>
-            </a:r>
-          </a:p>
-        </p:txBody>
-      </p:sp>
-      <p:sp>
-        <p:nvSpPr>
-          <p:cNvPr id="16" name="TextBox 15"/>
-          <p:cNvSpPr txBox="1"/>
-          <p:nvPr/>
-        </p:nvSpPr>
-        <p:spPr>
-          <a:xfrm>
-            <a:off x="6400800" y="4663440"/>
-            <a:ext cx="2743200" cy="274320"/>
-          </a:xfrm>
-          <a:prstGeom prst="rect">
-            <a:avLst/>
-          </a:prstGeom>
-          <a:noFill/>
-        </p:spPr>
-        <p:txBody>
-          <a:bodyPr wrap="square" lIns="45720" rIns="45720" tIns="27432" bIns="27432">
-            <a:spAutoFit/>
-          </a:bodyPr>
-          <a:lstStyle/>
-          <a:p>
-            <a:pPr algn="l">
-              <a:defRPr sz="800" b="0">
-                <a:solidFill>
-                  <a:srgbClr val="8A95BA"/>
-                </a:solidFill>
-                <a:latin typeface="Calibri"/>
-              </a:defRPr>
-            </a:pPr>
-            <a:r>
-              <a:t>[ガニェ事象4: 新しい内容を提示する]</a:t>
             </a:r>
           </a:p>
         </p:txBody>
@@ -7002,42 +6822,6 @@
             </a:pPr>
             <a:r>
               <a:t>Dunning-Kruger効果: レジデントは指導医より自信が高いのに正確性が低い</a:t>
-            </a:r>
-          </a:p>
-        </p:txBody>
-      </p:sp>
-      <p:sp>
-        <p:nvSpPr>
-          <p:cNvPr id="14" name="TextBox 13"/>
-          <p:cNvSpPr txBox="1"/>
-          <p:nvPr/>
-        </p:nvSpPr>
-        <p:spPr>
-          <a:xfrm>
-            <a:off x="5943600" y="4663440"/>
-            <a:ext cx="3200400" cy="274320"/>
-          </a:xfrm>
-          <a:prstGeom prst="rect">
-            <a:avLst/>
-          </a:prstGeom>
-          <a:noFill/>
-        </p:spPr>
-        <p:txBody>
-          <a:bodyPr wrap="square" lIns="45720" rIns="45720" tIns="27432" bIns="27432">
-            <a:spAutoFit/>
-          </a:bodyPr>
-          <a:lstStyle/>
-          <a:p>
-            <a:pPr algn="l">
-              <a:defRPr sz="800" b="0">
-                <a:solidFill>
-                  <a:srgbClr val="8A95BA"/>
-                </a:solidFill>
-                <a:latin typeface="Calibri"/>
-              </a:defRPr>
-            </a:pPr>
-            <a:r>
-              <a:t>[ガニェ事象4: 新しい内容を提示する（続き）]</a:t>
             </a:r>
           </a:p>
         </p:txBody>
@@ -7897,42 +7681,6 @@
           </a:p>
         </p:txBody>
       </p:sp>
-      <p:sp>
-        <p:nvSpPr>
-          <p:cNvPr id="8" name="TextBox 7"/>
-          <p:cNvSpPr txBox="1"/>
-          <p:nvPr/>
-        </p:nvSpPr>
-        <p:spPr>
-          <a:xfrm>
-            <a:off x="5943600" y="4663440"/>
-            <a:ext cx="3200400" cy="274320"/>
-          </a:xfrm>
-          <a:prstGeom prst="rect">
-            <a:avLst/>
-          </a:prstGeom>
-          <a:noFill/>
-        </p:spPr>
-        <p:txBody>
-          <a:bodyPr wrap="square" lIns="45720" rIns="45720" tIns="27432" bIns="27432">
-            <a:spAutoFit/>
-          </a:bodyPr>
-          <a:lstStyle/>
-          <a:p>
-            <a:pPr algn="l">
-              <a:defRPr sz="800" b="0">
-                <a:solidFill>
-                  <a:srgbClr val="8A95BA"/>
-                </a:solidFill>
-                <a:latin typeface="Calibri"/>
-              </a:defRPr>
-            </a:pPr>
-            <a:r>
-              <a:t>[ガニェ事象4: 新しい内容を提示する（続き）]</a:t>
-            </a:r>
-          </a:p>
-        </p:txBody>
-      </p:sp>
     </p:spTree>
   </p:cSld>
   <p:clrMapOvr>
@@ -8753,42 +8501,6 @@
             <a:br/>
             <a:r>
               <a:t>診断意思決定において成功が確認された唯一の介入</a:t>
-            </a:r>
-          </a:p>
-        </p:txBody>
-      </p:sp>
-      <p:sp>
-        <p:nvSpPr>
-          <p:cNvPr id="22" name="TextBox 21"/>
-          <p:cNvSpPr txBox="1"/>
-          <p:nvPr/>
-        </p:nvSpPr>
-        <p:spPr>
-          <a:xfrm>
-            <a:off x="6400800" y="4663440"/>
-            <a:ext cx="2743200" cy="274320"/>
-          </a:xfrm>
-          <a:prstGeom prst="rect">
-            <a:avLst/>
-          </a:prstGeom>
-          <a:noFill/>
-        </p:spPr>
-        <p:txBody>
-          <a:bodyPr wrap="square" lIns="45720" rIns="45720" tIns="27432" bIns="27432">
-            <a:spAutoFit/>
-          </a:bodyPr>
-          <a:lstStyle/>
-          <a:p>
-            <a:pPr algn="l">
-              <a:defRPr sz="800" b="0">
-                <a:solidFill>
-                  <a:srgbClr val="8A95BA"/>
-                </a:solidFill>
-                <a:latin typeface="Calibri"/>
-              </a:defRPr>
-            </a:pPr>
-            <a:r>
-              <a:t>[ガニェ事象5: 学習の指針を与える]</a:t>
             </a:r>
           </a:p>
         </p:txBody>
@@ -9511,42 +9223,6 @@
           </a:p>
         </p:txBody>
       </p:sp>
-      <p:sp>
-        <p:nvSpPr>
-          <p:cNvPr id="9" name="TextBox 8"/>
-          <p:cNvSpPr txBox="1"/>
-          <p:nvPr/>
-        </p:nvSpPr>
-        <p:spPr>
-          <a:xfrm>
-            <a:off x="5486400" y="4663440"/>
-            <a:ext cx="3657600" cy="274320"/>
-          </a:xfrm>
-          <a:prstGeom prst="rect">
-            <a:avLst/>
-          </a:prstGeom>
-          <a:noFill/>
-        </p:spPr>
-        <p:txBody>
-          <a:bodyPr wrap="square" lIns="45720" rIns="45720" tIns="27432" bIns="27432">
-            <a:spAutoFit/>
-          </a:bodyPr>
-          <a:lstStyle/>
-          <a:p>
-            <a:pPr algn="l">
-              <a:defRPr sz="800" b="0">
-                <a:solidFill>
-                  <a:srgbClr val="8A95BA"/>
-                </a:solidFill>
-                <a:latin typeface="Calibri"/>
-              </a:defRPr>
-            </a:pPr>
-            <a:r>
-              <a:t>[ガニェ事象6: 練習 / 事象7: フィードバック]</a:t>
-            </a:r>
-          </a:p>
-        </p:txBody>
-      </p:sp>
     </p:spTree>
   </p:cSld>
   <p:clrMapOvr>
@@ -9983,7 +9659,7 @@
         </p:nvSpPr>
         <p:spPr>
           <a:xfrm>
-            <a:off x="457200" y="2926080"/>
+            <a:off x="457200" y="3200400"/>
             <a:ext cx="54864" cy="731520"/>
           </a:xfrm>
           <a:prstGeom prst="rect">
@@ -10026,7 +9702,7 @@
         </p:nvSpPr>
         <p:spPr>
           <a:xfrm>
-            <a:off x="566928" y="2926080"/>
+            <a:off x="566928" y="3200400"/>
             <a:ext cx="8119872" cy="731520"/>
           </a:xfrm>
           <a:prstGeom prst="rect">
@@ -10071,7 +9747,7 @@
         </p:nvSpPr>
         <p:spPr>
           <a:xfrm>
-            <a:off x="685800" y="2999232"/>
+            <a:off x="685800" y="3273551"/>
             <a:ext cx="7863840" cy="585216"/>
           </a:xfrm>
           <a:prstGeom prst="rect">
@@ -10135,42 +9811,6 @@
             </a:pPr>
             <a:r>
               <a:t>Cabrera-Barona et al. (2024): マルチエージェントLLM会話による認知バイアス緩和の可能性</a:t>
-            </a:r>
-          </a:p>
-        </p:txBody>
-      </p:sp>
-      <p:sp>
-        <p:nvSpPr>
-          <p:cNvPr id="9" name="TextBox 8"/>
-          <p:cNvSpPr txBox="1"/>
-          <p:nvPr/>
-        </p:nvSpPr>
-        <p:spPr>
-          <a:xfrm>
-            <a:off x="5943600" y="4663440"/>
-            <a:ext cx="3200400" cy="274320"/>
-          </a:xfrm>
-          <a:prstGeom prst="rect">
-            <a:avLst/>
-          </a:prstGeom>
-          <a:noFill/>
-        </p:spPr>
-        <p:txBody>
-          <a:bodyPr wrap="square" lIns="45720" rIns="45720" tIns="27432" bIns="27432">
-            <a:spAutoFit/>
-          </a:bodyPr>
-          <a:lstStyle/>
-          <a:p>
-            <a:pPr algn="l">
-              <a:defRPr sz="800" b="0">
-                <a:solidFill>
-                  <a:srgbClr val="8A95BA"/>
-                </a:solidFill>
-                <a:latin typeface="Calibri"/>
-              </a:defRPr>
-            </a:pPr>
-            <a:r>
-              <a:t>[ガニェ事象5: 学習の指針を与える（続き）]</a:t>
             </a:r>
           </a:p>
         </p:txBody>

--- a/output/education/2026-03-30_cognitive-bias-diagnostic-reasoning/cognitive-bias-diagnostic-reasoning_slides_residents.pptx
+++ b/output/education/2026-03-30_cognitive-bias-diagnostic-reasoning/cognitive-bias-diagnostic-reasoning_slides_residents.pptx
@@ -3136,10 +3136,12 @@
               </a:defRPr>
             </a:pPr>
             <a:r>
+              <a:rPr/>
               <a:t>「完全に確信がある」医師の</a:t>
             </a:r>
             <a:br/>
             <a:r>
+              <a:rPr/>
               <a:t>40%が間違っていた</a:t>
             </a:r>
           </a:p>
@@ -3184,7 +3186,9 @@
           <a:bodyPr rtlCol="0" anchor="ctr"/>
           <a:lstStyle/>
           <a:p>
-            <a:pPr algn="ctr"/>
+            <a:pPr algn="ctr">
+              <a:defRPr/>
+            </a:pPr>
           </a:p>
         </p:txBody>
       </p:sp>
@@ -3197,7 +3201,7 @@
         <p:spPr>
           <a:xfrm>
             <a:off x="3200400" y="1920240"/>
-            <a:ext cx="2743200" cy="1097280"/>
+            <a:ext cx="2743200" cy="1158240"/>
           </a:xfrm>
           <a:prstGeom prst="rect">
             <a:avLst/>
@@ -3219,6 +3223,7 @@
               </a:defRPr>
             </a:pPr>
             <a:r>
+              <a:rPr/>
               <a:t>40%</a:t>
             </a:r>
           </a:p>
@@ -3255,6 +3260,7 @@
               </a:defRPr>
             </a:pPr>
             <a:r>
+              <a:rPr/>
               <a:t>ICU臨床診断 — 剖検との比較研究</a:t>
             </a:r>
           </a:p>
@@ -3299,7 +3305,9 @@
           <a:bodyPr rtlCol="0" anchor="ctr"/>
           <a:lstStyle/>
           <a:p>
-            <a:pPr algn="ctr"/>
+            <a:pPr algn="ctr">
+              <a:defRPr/>
+            </a:pPr>
           </a:p>
         </p:txBody>
       </p:sp>
@@ -3344,7 +3352,9 @@
           <a:bodyPr rtlCol="0" anchor="ctr"/>
           <a:lstStyle/>
           <a:p>
-            <a:pPr algn="ctr"/>
+            <a:pPr algn="ctr">
+              <a:defRPr/>
+            </a:pPr>
           </a:p>
         </p:txBody>
       </p:sp>
@@ -3379,10 +3389,12 @@
               </a:defRPr>
             </a:pPr>
             <a:r>
+              <a:rPr/>
               <a:t>これは能力の問題ではない。人間の脳に構造的に組み込まれた</a:t>
             </a:r>
             <a:br/>
             <a:r>
+              <a:rPr/>
               <a:t>予測可能なシステムエラーである。</a:t>
             </a:r>
           </a:p>
@@ -3445,6 +3457,7 @@
               </a:defRPr>
             </a:pPr>
             <a:r>
+              <a:rPr/>
               <a:t>明日の診療で試してほしいこと</a:t>
             </a:r>
           </a:p>
@@ -3489,7 +3502,9 @@
           <a:bodyPr rtlCol="0" anchor="ctr"/>
           <a:lstStyle/>
           <a:p>
-            <a:pPr algn="ctr"/>
+            <a:pPr algn="ctr">
+              <a:defRPr/>
+            </a:pPr>
           </a:p>
         </p:txBody>
       </p:sp>
@@ -3532,7 +3547,9 @@
           <a:bodyPr rtlCol="0" anchor="ctr"/>
           <a:lstStyle/>
           <a:p>
-            <a:pPr algn="ctr"/>
+            <a:pPr algn="ctr">
+              <a:defRPr/>
+            </a:pPr>
           </a:p>
         </p:txBody>
       </p:sp>
@@ -3567,6 +3584,7 @@
               </a:defRPr>
             </a:pPr>
             <a:r>
+              <a:rPr/>
               <a:t>1</a:t>
             </a:r>
           </a:p>
@@ -3581,7 +3599,7 @@
         <p:spPr>
           <a:xfrm>
             <a:off x="1645920" y="868680"/>
-            <a:ext cx="2743200" cy="274320"/>
+            <a:ext cx="2743200" cy="301752"/>
           </a:xfrm>
           <a:prstGeom prst="rect">
             <a:avLst/>
@@ -3603,6 +3621,7 @@
               </a:defRPr>
             </a:pPr>
             <a:r>
+              <a:rPr/>
               <a:t>診断タイムアウト</a:t>
             </a:r>
           </a:p>
@@ -3639,10 +3658,12 @@
               </a:defRPr>
             </a:pPr>
             <a:r>
+              <a:rPr/>
               <a:t>1日1回、診断確定前に</a:t>
             </a:r>
             <a:br/>
             <a:r>
+              <a:rPr/>
               <a:t>他に何があり得るか？と自問する</a:t>
             </a:r>
           </a:p>
@@ -3687,7 +3708,9 @@
           <a:bodyPr rtlCol="0" anchor="ctr"/>
           <a:lstStyle/>
           <a:p>
-            <a:pPr algn="ctr"/>
+            <a:pPr algn="ctr">
+              <a:defRPr/>
+            </a:pPr>
           </a:p>
         </p:txBody>
       </p:sp>
@@ -3722,6 +3745,7 @@
               </a:defRPr>
             </a:pPr>
             <a:r>
+              <a:rPr/>
               <a:t>2</a:t>
             </a:r>
           </a:p>
@@ -3736,7 +3760,7 @@
         <p:spPr>
           <a:xfrm>
             <a:off x="1645920" y="1783080"/>
-            <a:ext cx="2743200" cy="274320"/>
+            <a:ext cx="2743200" cy="301751"/>
           </a:xfrm>
           <a:prstGeom prst="rect">
             <a:avLst/>
@@ -3758,6 +3782,7 @@
               </a:defRPr>
             </a:pPr>
             <a:r>
+              <a:rPr/>
               <a:t>バイアス日誌</a:t>
             </a:r>
           </a:p>
@@ -3794,10 +3819,12 @@
               </a:defRPr>
             </a:pPr>
             <a:r>
+              <a:rPr/>
               <a:t>今週中に1例、自分の推論プロセスを</a:t>
             </a:r>
             <a:br/>
             <a:r>
+              <a:rPr/>
               <a:t>4つの問い（スライド8）で振り返る</a:t>
             </a:r>
           </a:p>
@@ -3842,7 +3869,9 @@
           <a:bodyPr rtlCol="0" anchor="ctr"/>
           <a:lstStyle/>
           <a:p>
-            <a:pPr algn="ctr"/>
+            <a:pPr algn="ctr">
+              <a:defRPr/>
+            </a:pPr>
           </a:p>
         </p:txBody>
       </p:sp>
@@ -3877,6 +3906,7 @@
               </a:defRPr>
             </a:pPr>
             <a:r>
+              <a:rPr/>
               <a:t>3</a:t>
             </a:r>
           </a:p>
@@ -3891,7 +3921,7 @@
         <p:spPr>
           <a:xfrm>
             <a:off x="1645920" y="2697479"/>
-            <a:ext cx="2743200" cy="274320"/>
+            <a:ext cx="2743200" cy="301752"/>
           </a:xfrm>
           <a:prstGeom prst="rect">
             <a:avLst/>
@@ -3913,6 +3943,7 @@
               </a:defRPr>
             </a:pPr>
             <a:r>
+              <a:rPr/>
               <a:t>再フレーミング</a:t>
             </a:r>
           </a:p>
@@ -3949,10 +3980,12 @@
               </a:defRPr>
             </a:pPr>
             <a:r>
+              <a:rPr/>
               <a:t>バイアスは個人の失敗ではない。</a:t>
             </a:r>
             <a:br/>
             <a:r>
+              <a:rPr/>
               <a:t>認識することがメタ認知能力の高さを示す</a:t>
             </a:r>
           </a:p>
@@ -3997,7 +4030,9 @@
           <a:bodyPr rtlCol="0" anchor="ctr"/>
           <a:lstStyle/>
           <a:p>
-            <a:pPr algn="ctr"/>
+            <a:pPr algn="ctr">
+              <a:defRPr/>
+            </a:pPr>
           </a:p>
         </p:txBody>
       </p:sp>
@@ -4042,7 +4077,9 @@
           <a:bodyPr rtlCol="0" anchor="ctr"/>
           <a:lstStyle/>
           <a:p>
-            <a:pPr algn="ctr"/>
+            <a:pPr algn="ctr">
+              <a:defRPr/>
+            </a:pPr>
           </a:p>
         </p:txBody>
       </p:sp>
@@ -4077,10 +4114,12 @@
               </a:defRPr>
             </a:pPr>
             <a:r>
+              <a:rPr/>
               <a:t>予測可能なシステムエラーとして認知バイアスを捉えたとき、</a:t>
             </a:r>
             <a:br/>
             <a:r>
+              <a:rPr/>
               <a:t>あなたの診療はどう変わるか？</a:t>
             </a:r>
           </a:p>
@@ -4121,7 +4160,7 @@
         <p:spPr>
           <a:xfrm>
             <a:off x="457200" y="274320"/>
-            <a:ext cx="8229600" cy="457200"/>
+            <a:ext cx="8229600" cy="482600"/>
           </a:xfrm>
           <a:prstGeom prst="rect">
             <a:avLst/>
@@ -4143,6 +4182,7 @@
               </a:defRPr>
             </a:pPr>
             <a:r>
+              <a:rPr/>
               <a:t>本日のゴール（20分後のあなた）</a:t>
             </a:r>
           </a:p>
@@ -4187,7 +4227,9 @@
           <a:bodyPr rtlCol="0" anchor="ctr"/>
           <a:lstStyle/>
           <a:p>
-            <a:pPr algn="ctr"/>
+            <a:pPr algn="ctr">
+              <a:defRPr/>
+            </a:pPr>
           </a:p>
         </p:txBody>
       </p:sp>
@@ -4230,7 +4272,9 @@
           <a:bodyPr rtlCol="0" anchor="ctr"/>
           <a:lstStyle/>
           <a:p>
-            <a:pPr algn="ctr"/>
+            <a:pPr algn="ctr">
+              <a:defRPr/>
+            </a:pPr>
           </a:p>
         </p:txBody>
       </p:sp>
@@ -4265,6 +4309,7 @@
               </a:defRPr>
             </a:pPr>
             <a:r>
+              <a:rPr/>
               <a:t>認識できる</a:t>
             </a:r>
           </a:p>
@@ -4301,10 +4346,12 @@
               </a:defRPr>
             </a:pPr>
             <a:r>
+              <a:rPr/>
               <a:t>4つの認知バイアスを</a:t>
             </a:r>
             <a:br/>
             <a:r>
+              <a:rPr/>
               <a:t>臨床場面で見分けられる</a:t>
             </a:r>
           </a:p>
@@ -4349,7 +4396,9 @@
           <a:bodyPr rtlCol="0" anchor="ctr"/>
           <a:lstStyle/>
           <a:p>
-            <a:pPr algn="ctr"/>
+            <a:pPr algn="ctr">
+              <a:defRPr/>
+            </a:pPr>
           </a:p>
         </p:txBody>
       </p:sp>
@@ -4384,6 +4433,7 @@
               </a:defRPr>
             </a:pPr>
             <a:r>
+              <a:rPr/>
               <a:t>実践できる</a:t>
             </a:r>
           </a:p>
@@ -4420,10 +4470,12 @@
               </a:defRPr>
             </a:pPr>
             <a:r>
+              <a:rPr/>
               <a:t>除偏介入を3つ使える</a:t>
             </a:r>
             <a:br/>
             <a:r>
+              <a:rPr/>
               <a:t>（タイムアウト、プレモーテム、構造化振り返り）</a:t>
             </a:r>
           </a:p>
@@ -4468,7 +4520,9 @@
           <a:bodyPr rtlCol="0" anchor="ctr"/>
           <a:lstStyle/>
           <a:p>
-            <a:pPr algn="ctr"/>
+            <a:pPr algn="ctr">
+              <a:defRPr/>
+            </a:pPr>
           </a:p>
         </p:txBody>
       </p:sp>
@@ -4503,6 +4557,7 @@
               </a:defRPr>
             </a:pPr>
             <a:r>
+              <a:rPr/>
               <a:t>振り返れる</a:t>
             </a:r>
           </a:p>
@@ -4539,10 +4594,12 @@
               </a:defRPr>
             </a:pPr>
             <a:r>
+              <a:rPr/>
               <a:t>自分の推論プロセスを</a:t>
             </a:r>
             <a:br/>
             <a:r>
+              <a:rPr/>
               <a:t>構造化して省察できる</a:t>
             </a:r>
           </a:p>
@@ -4579,6 +4636,7 @@
               </a:defRPr>
             </a:pPr>
             <a:r>
+              <a:rPr/>
               <a:t>ブルーム分類: 理解 → 分析 → 創造 | 二重過程理論 × 認知的強制戦略</a:t>
             </a:r>
           </a:p>
@@ -4641,6 +4699,7 @@
               </a:defRPr>
             </a:pPr>
             <a:r>
+              <a:rPr/>
               <a:t>Kahnemanの二重過程理論 — 速い脳と遅い脳</a:t>
             </a:r>
           </a:p>
@@ -4685,7 +4744,9 @@
           <a:bodyPr rtlCol="0" anchor="ctr"/>
           <a:lstStyle/>
           <a:p>
-            <a:pPr algn="ctr"/>
+            <a:pPr algn="ctr">
+              <a:defRPr/>
+            </a:pPr>
           </a:p>
         </p:txBody>
       </p:sp>
@@ -5235,7 +5296,9 @@
           <a:bodyPr rtlCol="0" anchor="ctr"/>
           <a:lstStyle/>
           <a:p>
-            <a:pPr algn="ctr"/>
+            <a:pPr algn="ctr">
+              <a:defRPr/>
+            </a:pPr>
           </a:p>
         </p:txBody>
       </p:sp>
@@ -5280,7 +5343,9 @@
           <a:bodyPr rtlCol="0" anchor="ctr"/>
           <a:lstStyle/>
           <a:p>
-            <a:pPr algn="ctr"/>
+            <a:pPr algn="ctr">
+              <a:defRPr/>
+            </a:pPr>
           </a:p>
         </p:txBody>
       </p:sp>
@@ -5315,10 +5380,12 @@
               </a:defRPr>
             </a:pPr>
             <a:r>
+              <a:rPr/>
               <a:t>System 1が生成した仮説を、System 2が十分にチェックしないとき、バイアスが発動する</a:t>
             </a:r>
             <a:br/>
             <a:r>
+              <a:rPr/>
               <a:t>— Enke (2023): 高ステークでもバイアスは縮小するが完全には消えない</a:t>
             </a:r>
           </a:p>
@@ -5381,6 +5448,7 @@
               </a:defRPr>
             </a:pPr>
             <a:r>
+              <a:rPr/>
               <a:t>確認バイアス × アンカリング</a:t>
             </a:r>
           </a:p>
@@ -5425,7 +5493,9 @@
           <a:bodyPr rtlCol="0" anchor="ctr"/>
           <a:lstStyle/>
           <a:p>
-            <a:pPr algn="ctr"/>
+            <a:pPr algn="ctr">
+              <a:defRPr/>
+            </a:pPr>
           </a:p>
         </p:txBody>
       </p:sp>
@@ -5470,7 +5540,9 @@
           <a:bodyPr rtlCol="0" anchor="ctr"/>
           <a:lstStyle/>
           <a:p>
-            <a:pPr algn="ctr"/>
+            <a:pPr algn="ctr">
+              <a:defRPr/>
+            </a:pPr>
           </a:p>
         </p:txBody>
       </p:sp>
@@ -5483,7 +5555,7 @@
         <p:spPr>
           <a:xfrm>
             <a:off x="457200" y="868680"/>
-            <a:ext cx="3840480" cy="274320"/>
+            <a:ext cx="3840480" cy="301752"/>
           </a:xfrm>
           <a:prstGeom prst="rect">
             <a:avLst/>
@@ -5505,6 +5577,7 @@
               </a:defRPr>
             </a:pPr>
             <a:r>
+              <a:rPr/>
               <a:t>確認バイアス（Confirmation Bias）</a:t>
             </a:r>
           </a:p>
@@ -5541,10 +5614,12 @@
               </a:defRPr>
             </a:pPr>
             <a:r>
+              <a:rPr/>
               <a:t>初期仮説を支持する情報を選択的に収集し、</a:t>
             </a:r>
             <a:br/>
             <a:r>
+              <a:rPr/>
               <a:t>矛盾する情報を無視・過小評価する傾向</a:t>
             </a:r>
           </a:p>
@@ -5581,18 +5656,22 @@
               </a:defRPr>
             </a:pPr>
             <a:r>
+              <a:rPr/>
               <a:t>ケース: 32歳女性、不安障害既往、胸痛</a:t>
             </a:r>
             <a:br/>
             <a:r>
+              <a:rPr/>
               <a:t>→「パニック発作」仮説 → 確認的質問に偏る</a:t>
             </a:r>
             <a:br/>
             <a:r>
+              <a:rPr/>
               <a:t>→ SpO2 96%を不安のせいと軽視</a:t>
             </a:r>
             <a:br/>
             <a:r>
+              <a:rPr/>
               <a:t>→ 肺塞栓症の見逃し</a:t>
             </a:r>
           </a:p>
@@ -5639,7 +5718,9 @@
           <a:bodyPr rtlCol="0" anchor="ctr"/>
           <a:lstStyle/>
           <a:p>
-            <a:pPr algn="ctr"/>
+            <a:pPr algn="ctr">
+              <a:defRPr/>
+            </a:pPr>
           </a:p>
         </p:txBody>
       </p:sp>
@@ -5652,7 +5733,7 @@
         <p:spPr>
           <a:xfrm>
             <a:off x="4846320" y="868680"/>
-            <a:ext cx="3840480" cy="274320"/>
+            <a:ext cx="3840480" cy="301752"/>
           </a:xfrm>
           <a:prstGeom prst="rect">
             <a:avLst/>
@@ -5674,6 +5755,7 @@
               </a:defRPr>
             </a:pPr>
             <a:r>
+              <a:rPr/>
               <a:t>アンカリング（Anchoring）</a:t>
             </a:r>
           </a:p>
@@ -5710,10 +5792,12 @@
               </a:defRPr>
             </a:pPr>
             <a:r>
+              <a:rPr/>
               <a:t>最初に得た情報に過度に依存し、</a:t>
             </a:r>
             <a:br/>
             <a:r>
+              <a:rPr/>
               <a:t>後続の情報で十分な調整ができない傾向</a:t>
             </a:r>
           </a:p>
@@ -5750,18 +5834,22 @@
               </a:defRPr>
             </a:pPr>
             <a:r>
+              <a:rPr/>
               <a:t>ケース: 58歳男性、紹介状「GERD増悪疑い」</a:t>
             </a:r>
             <a:br/>
             <a:r>
+              <a:rPr/>
               <a:t>→ 紹介状がアンカーに</a:t>
             </a:r>
             <a:br/>
             <a:r>
+              <a:rPr/>
               <a:t>→ 労作時増悪・冷汗に注意が向かない</a:t>
             </a:r>
             <a:br/>
             <a:r>
+              <a:rPr/>
               <a:t>→ 急性冠症候群の診断遅延</a:t>
             </a:r>
           </a:p>
@@ -5806,7 +5894,9 @@
           <a:bodyPr rtlCol="0" anchor="ctr"/>
           <a:lstStyle/>
           <a:p>
-            <a:pPr algn="ctr"/>
+            <a:pPr algn="ctr">
+              <a:defRPr/>
+            </a:pPr>
           </a:p>
         </p:txBody>
       </p:sp>
@@ -5851,7 +5941,9 @@
           <a:bodyPr rtlCol="0" anchor="ctr"/>
           <a:lstStyle/>
           <a:p>
-            <a:pPr algn="ctr"/>
+            <a:pPr algn="ctr">
+              <a:defRPr/>
+            </a:pPr>
           </a:p>
         </p:txBody>
       </p:sp>
@@ -5886,10 +5978,12 @@
               </a:defRPr>
             </a:pPr>
             <a:r>
+              <a:rPr/>
               <a:t>紹介状という権威ある情報源がアンカーの強度を増幅。</a:t>
             </a:r>
             <a:br/>
             <a:r>
+              <a:rPr/>
               <a:t>年間約27,000件の入院と150,000件以上の患者被害が診断エラーに起因（米国）</a:t>
             </a:r>
           </a:p>
@@ -5926,6 +6020,7 @@
               </a:defRPr>
             </a:pPr>
             <a:r>
+              <a:rPr/>
               <a:t>エラーの構造: 既往歴がアンカーとなり、確認バイアスがそれを強化する複合パターン</a:t>
             </a:r>
           </a:p>
@@ -5988,6 +6083,7 @@
               </a:defRPr>
             </a:pPr>
             <a:r>
+              <a:rPr/>
               <a:t>利用可能性ヒューリスティック × 過信</a:t>
             </a:r>
           </a:p>
@@ -6032,7 +6128,9 @@
           <a:bodyPr rtlCol="0" anchor="ctr"/>
           <a:lstStyle/>
           <a:p>
-            <a:pPr algn="ctr"/>
+            <a:pPr algn="ctr">
+              <a:defRPr/>
+            </a:pPr>
           </a:p>
         </p:txBody>
       </p:sp>
@@ -6077,7 +6175,9 @@
           <a:bodyPr rtlCol="0" anchor="ctr"/>
           <a:lstStyle/>
           <a:p>
-            <a:pPr algn="ctr"/>
+            <a:pPr algn="ctr">
+              <a:defRPr/>
+            </a:pPr>
           </a:p>
         </p:txBody>
       </p:sp>
@@ -6090,7 +6190,7 @@
         <p:spPr>
           <a:xfrm>
             <a:off x="457200" y="868680"/>
-            <a:ext cx="3840480" cy="274320"/>
+            <a:ext cx="3840480" cy="301752"/>
           </a:xfrm>
           <a:prstGeom prst="rect">
             <a:avLst/>
@@ -6112,6 +6212,7 @@
               </a:defRPr>
             </a:pPr>
             <a:r>
+              <a:rPr/>
               <a:t>利用可能性（Availability）</a:t>
             </a:r>
           </a:p>
@@ -6148,10 +6249,12 @@
               </a:defRPr>
             </a:pPr>
             <a:r>
+              <a:rPr/>
               <a:t>思い出しやすい情報に基づいて</a:t>
             </a:r>
             <a:br/>
             <a:r>
+              <a:rPr/>
               <a:t>確率を推定してしまう傾向</a:t>
             </a:r>
           </a:p>
@@ -6188,18 +6291,22 @@
               </a:defRPr>
             </a:pPr>
             <a:r>
+              <a:rPr/>
               <a:t>ケース: 肺炎見逃しの翌週</a:t>
             </a:r>
             <a:br/>
             <a:r>
+              <a:rPr/>
               <a:t>→ 咳嗽の患者で肺炎を過大評価</a:t>
             </a:r>
             <a:br/>
             <a:r>
+              <a:rPr/>
               <a:t>→ 不要なCTオーダー増加</a:t>
             </a:r>
             <a:br/>
             <a:r>
+              <a:rPr/>
               <a:t>→ 心不全・気管支喘息を見落とす</a:t>
             </a:r>
           </a:p>
@@ -6246,7 +6353,9 @@
           <a:bodyPr rtlCol="0" anchor="ctr"/>
           <a:lstStyle/>
           <a:p>
-            <a:pPr algn="ctr"/>
+            <a:pPr algn="ctr">
+              <a:defRPr/>
+            </a:pPr>
           </a:p>
         </p:txBody>
       </p:sp>
@@ -6259,7 +6368,7 @@
         <p:spPr>
           <a:xfrm>
             <a:off x="4846320" y="868680"/>
-            <a:ext cx="3840480" cy="274320"/>
+            <a:ext cx="3840480" cy="301752"/>
           </a:xfrm>
           <a:prstGeom prst="rect">
             <a:avLst/>
@@ -6281,6 +6390,7 @@
               </a:defRPr>
             </a:pPr>
             <a:r>
+              <a:rPr/>
               <a:t>過信（Overconfidence）</a:t>
             </a:r>
           </a:p>
@@ -6317,10 +6427,12 @@
               </a:defRPr>
             </a:pPr>
             <a:r>
+              <a:rPr/>
               <a:t>自分の判断の正確さを過大評価し、</a:t>
             </a:r>
             <a:br/>
             <a:r>
+              <a:rPr/>
               <a:t>不確実性の範囲を過小見積もりする傾向</a:t>
             </a:r>
           </a:p>
@@ -6357,14 +6469,17 @@
               </a:defRPr>
             </a:pPr>
             <a:r>
+              <a:rPr/>
               <a:t>3形態: 過精度（90%確信→実際60%）</a:t>
             </a:r>
             <a:br/>
             <a:r>
+              <a:rPr/>
               <a:t>過大評価（能力を過信）</a:t>
             </a:r>
             <a:br/>
             <a:r>
+              <a:rPr/>
               <a:t>過配置（自分は平均以上と信じる）</a:t>
             </a:r>
           </a:p>
@@ -6821,6 +6936,7 @@
               </a:defRPr>
             </a:pPr>
             <a:r>
+              <a:rPr/>
               <a:t>Dunning-Kruger効果: レジデントは指導医より自信が高いのに正確性が低い</a:t>
             </a:r>
           </a:p>
@@ -6883,6 +6999,7 @@
               </a:defRPr>
             </a:pPr>
             <a:r>
+              <a:rPr/>
               <a:t>4バイアスの統合フレーム — 予測可能なシステムエラー</a:t>
             </a:r>
           </a:p>
@@ -6927,7 +7044,9 @@
           <a:bodyPr rtlCol="0" anchor="ctr"/>
           <a:lstStyle/>
           <a:p>
-            <a:pPr algn="ctr"/>
+            <a:pPr algn="ctr">
+              <a:defRPr/>
+            </a:pPr>
           </a:p>
         </p:txBody>
       </p:sp>
@@ -7592,7 +7711,9 @@
           <a:bodyPr rtlCol="0" anchor="ctr"/>
           <a:lstStyle/>
           <a:p>
-            <a:pPr algn="ctr"/>
+            <a:pPr algn="ctr">
+              <a:defRPr/>
+            </a:pPr>
           </a:p>
         </p:txBody>
       </p:sp>
@@ -7637,7 +7758,9 @@
           <a:bodyPr rtlCol="0" anchor="ctr"/>
           <a:lstStyle/>
           <a:p>
-            <a:pPr algn="ctr"/>
+            <a:pPr algn="ctr">
+              <a:defRPr/>
+            </a:pPr>
           </a:p>
         </p:txBody>
       </p:sp>
@@ -7672,10 +7795,12 @@
               </a:defRPr>
             </a:pPr>
             <a:r>
+              <a:rPr/>
               <a:t>診断エラーの36-77%に認知バイアスが寄与（Saposnik et al., 2016）</a:t>
             </a:r>
             <a:br/>
             <a:r>
+              <a:rPr/>
               <a:t>これはランダムなミスではなく、予測可能なパターンである</a:t>
             </a:r>
           </a:p>
@@ -7738,6 +7863,7 @@
               </a:defRPr>
             </a:pPr>
             <a:r>
+              <a:rPr/>
               <a:t>あなたの脳を守る3つの武器</a:t>
             </a:r>
           </a:p>
@@ -7782,7 +7908,9 @@
           <a:bodyPr rtlCol="0" anchor="ctr"/>
           <a:lstStyle/>
           <a:p>
-            <a:pPr algn="ctr"/>
+            <a:pPr algn="ctr">
+              <a:defRPr/>
+            </a:pPr>
           </a:p>
         </p:txBody>
       </p:sp>
@@ -7827,7 +7955,9 @@
           <a:bodyPr rtlCol="0" anchor="ctr"/>
           <a:lstStyle/>
           <a:p>
-            <a:pPr algn="ctr"/>
+            <a:pPr algn="ctr">
+              <a:defRPr/>
+            </a:pPr>
           </a:p>
         </p:txBody>
       </p:sp>
@@ -7862,6 +7992,7 @@
               </a:defRPr>
             </a:pPr>
             <a:r>
+              <a:rPr/>
               <a:t>1</a:t>
             </a:r>
           </a:p>
@@ -7898,6 +8029,7 @@
               </a:defRPr>
             </a:pPr>
             <a:r>
+              <a:rPr/>
               <a:t>診断タイムアウト</a:t>
             </a:r>
           </a:p>
@@ -7911,7 +8043,7 @@
         </p:nvSpPr>
         <p:spPr>
           <a:xfrm>
-            <a:off x="731520" y="1143000"/>
+            <a:off x="731520" y="1252728"/>
             <a:ext cx="2194560" cy="274320"/>
           </a:xfrm>
           <a:prstGeom prst="rect">
@@ -7934,6 +8066,7 @@
               </a:defRPr>
             </a:pPr>
             <a:r>
+              <a:rPr/>
               <a:t>Diagnostic Timeout</a:t>
             </a:r>
           </a:p>
@@ -7947,7 +8080,7 @@
         </p:nvSpPr>
         <p:spPr>
           <a:xfrm>
-            <a:off x="411479" y="1463040"/>
+            <a:off x="411479" y="1545336"/>
             <a:ext cx="2468880" cy="1828800"/>
           </a:xfrm>
           <a:prstGeom prst="rect">
@@ -7970,14 +8103,17 @@
               </a:defRPr>
             </a:pPr>
             <a:r>
+              <a:rPr/>
               <a:t>診断プロセスの特定時点で意図的に立ち止まる</a:t>
             </a:r>
             <a:br/>
             <a:r>
+              <a:rPr/>
               <a:t>自問: 他に何があり得るか？</a:t>
             </a:r>
             <a:br/>
             <a:r>
+              <a:rPr/>
               <a:t>Croskerry (2003) の認知的強制戦略の中核技法</a:t>
             </a:r>
           </a:p>
@@ -8024,7 +8160,9 @@
           <a:bodyPr rtlCol="0" anchor="ctr"/>
           <a:lstStyle/>
           <a:p>
-            <a:pPr algn="ctr"/>
+            <a:pPr algn="ctr">
+              <a:defRPr/>
+            </a:pPr>
           </a:p>
         </p:txBody>
       </p:sp>
@@ -8059,6 +8197,7 @@
               </a:defRPr>
             </a:pPr>
             <a:r>
+              <a:rPr/>
               <a:t>2</a:t>
             </a:r>
           </a:p>
@@ -8095,6 +8234,7 @@
               </a:defRPr>
             </a:pPr>
             <a:r>
+              <a:rPr/>
               <a:t>プレモーテム分析</a:t>
             </a:r>
           </a:p>
@@ -8108,7 +8248,7 @@
         </p:nvSpPr>
         <p:spPr>
           <a:xfrm>
-            <a:off x="3657600" y="1143000"/>
+            <a:off x="3657600" y="1252728"/>
             <a:ext cx="2194560" cy="274320"/>
           </a:xfrm>
           <a:prstGeom prst="rect">
@@ -8131,6 +8271,7 @@
               </a:defRPr>
             </a:pPr>
             <a:r>
+              <a:rPr/>
               <a:t>Pre-mortem Analysis</a:t>
             </a:r>
           </a:p>
@@ -8144,7 +8285,7 @@
         </p:nvSpPr>
         <p:spPr>
           <a:xfrm>
-            <a:off x="3337560" y="1463040"/>
+            <a:off x="3337560" y="1545336"/>
             <a:ext cx="2468880" cy="1828800"/>
           </a:xfrm>
           <a:prstGeom prst="rect">
@@ -8167,14 +8308,17 @@
               </a:defRPr>
             </a:pPr>
             <a:r>
+              <a:rPr/>
               <a:t>もしこの診断が間違っていたら、</a:t>
             </a:r>
             <a:br/>
             <a:r>
+              <a:rPr/>
               <a:t>最も可能性の高い理由は？</a:t>
             </a:r>
             <a:br/>
             <a:r>
+              <a:rPr/>
               <a:t>確定前に誤りの可能性を積極的に想像する</a:t>
             </a:r>
           </a:p>
@@ -8221,7 +8365,9 @@
           <a:bodyPr rtlCol="0" anchor="ctr"/>
           <a:lstStyle/>
           <a:p>
-            <a:pPr algn="ctr"/>
+            <a:pPr algn="ctr">
+              <a:defRPr/>
+            </a:pPr>
           </a:p>
         </p:txBody>
       </p:sp>
@@ -8256,6 +8402,7 @@
               </a:defRPr>
             </a:pPr>
             <a:r>
+              <a:rPr/>
               <a:t>3</a:t>
             </a:r>
           </a:p>
@@ -8292,6 +8439,7 @@
               </a:defRPr>
             </a:pPr>
             <a:r>
+              <a:rPr/>
               <a:t>構造化振り返り</a:t>
             </a:r>
           </a:p>
@@ -8305,7 +8453,7 @@
         </p:nvSpPr>
         <p:spPr>
           <a:xfrm>
-            <a:off x="6583680" y="1143000"/>
+            <a:off x="6583680" y="1252728"/>
             <a:ext cx="2194560" cy="274320"/>
           </a:xfrm>
           <a:prstGeom prst="rect">
@@ -8328,6 +8476,7 @@
               </a:defRPr>
             </a:pPr>
             <a:r>
+              <a:rPr/>
               <a:t>Cognitive Autopsy</a:t>
             </a:r>
           </a:p>
@@ -8341,7 +8490,7 @@
         </p:nvSpPr>
         <p:spPr>
           <a:xfrm>
-            <a:off x="6263640" y="1463040"/>
+            <a:off x="6263640" y="1545336"/>
             <a:ext cx="2468880" cy="1828800"/>
           </a:xfrm>
           <a:prstGeom prst="rect">
@@ -8364,14 +8513,17 @@
               </a:defRPr>
             </a:pPr>
             <a:r>
+              <a:rPr/>
               <a:t>どの情報を重視したか？無視した情報は？</a:t>
             </a:r>
             <a:br/>
             <a:r>
+              <a:rPr/>
               <a:t>最初の仮説はいつ形成されたか？</a:t>
             </a:r>
             <a:br/>
             <a:r>
+              <a:rPr/>
               <a:t>別の医師なら異なる結論に至るか？</a:t>
             </a:r>
           </a:p>
@@ -8416,7 +8568,9 @@
           <a:bodyPr rtlCol="0" anchor="ctr"/>
           <a:lstStyle/>
           <a:p>
-            <a:pPr algn="ctr"/>
+            <a:pPr algn="ctr">
+              <a:defRPr/>
+            </a:pPr>
           </a:p>
         </p:txBody>
       </p:sp>
@@ -8461,7 +8615,9 @@
           <a:bodyPr rtlCol="0" anchor="ctr"/>
           <a:lstStyle/>
           <a:p>
-            <a:pPr algn="ctr"/>
+            <a:pPr algn="ctr">
+              <a:defRPr/>
+            </a:pPr>
           </a:p>
         </p:txBody>
       </p:sp>
@@ -8496,10 +8652,12 @@
               </a:defRPr>
             </a:pPr>
             <a:r>
+              <a:rPr/>
               <a:t>Ludolph &amp; Schulz (2018): 診断仮説に対する省察が</a:t>
             </a:r>
             <a:br/>
             <a:r>
+              <a:rPr/>
               <a:t>診断意思決定において成功が確認された唯一の介入</a:t>
             </a:r>
           </a:p>
@@ -8562,6 +8720,7 @@
               </a:defRPr>
             </a:pPr>
             <a:r>
+              <a:rPr/>
               <a:t>構造化振り返りをやってみよう（5分）</a:t>
             </a:r>
           </a:p>
@@ -8606,7 +8765,9 @@
           <a:bodyPr rtlCol="0" anchor="ctr"/>
           <a:lstStyle/>
           <a:p>
-            <a:pPr algn="ctr"/>
+            <a:pPr algn="ctr">
+              <a:defRPr/>
+            </a:pPr>
           </a:p>
         </p:txBody>
       </p:sp>
@@ -8619,7 +8780,7 @@
         <p:spPr>
           <a:xfrm>
             <a:off x="457200" y="914400"/>
-            <a:ext cx="8229600" cy="274320"/>
+            <a:ext cx="8229600" cy="304799"/>
           </a:xfrm>
           <a:prstGeom prst="rect">
             <a:avLst/>
@@ -8641,6 +8802,7 @@
               </a:defRPr>
             </a:pPr>
             <a:r>
+              <a:rPr/>
               <a:t>ペアで実施: 最近の診療で診断に迷った症例を1つ思い出し、4つの問いに答える</a:t>
             </a:r>
           </a:p>
@@ -9134,7 +9296,9 @@
           <a:bodyPr rtlCol="0" anchor="ctr"/>
           <a:lstStyle/>
           <a:p>
-            <a:pPr algn="ctr"/>
+            <a:pPr algn="ctr">
+              <a:defRPr/>
+            </a:pPr>
           </a:p>
         </p:txBody>
       </p:sp>
@@ -9179,7 +9343,9 @@
           <a:bodyPr rtlCol="0" anchor="ctr"/>
           <a:lstStyle/>
           <a:p>
-            <a:pPr algn="ctr"/>
+            <a:pPr algn="ctr">
+              <a:defRPr/>
+            </a:pPr>
           </a:p>
         </p:txBody>
       </p:sp>
@@ -9214,10 +9380,12 @@
               </a:defRPr>
             </a:pPr>
             <a:r>
+              <a:rPr/>
               <a:t>パートナーにもしその診断が間違っていたら？と聞いてもらう（プレモーテム）</a:t>
             </a:r>
             <a:br/>
             <a:r>
+              <a:rPr/>
               <a:t>推論プロセスを可視化する練習であり、正解・不正解の議論ではない</a:t>
             </a:r>
           </a:p>
@@ -9258,7 +9426,7 @@
         <p:spPr>
           <a:xfrm>
             <a:off x="457200" y="274320"/>
-            <a:ext cx="8229600" cy="457200"/>
+            <a:ext cx="8229600" cy="482600"/>
           </a:xfrm>
           <a:prstGeom prst="rect">
             <a:avLst/>
@@ -9280,6 +9448,7 @@
               </a:defRPr>
             </a:pPr>
             <a:r>
+              <a:rPr/>
               <a:t>AIは味方か、新たなバイアス源か？</a:t>
             </a:r>
           </a:p>
@@ -9324,7 +9493,9 @@
           <a:bodyPr rtlCol="0" anchor="ctr"/>
           <a:lstStyle/>
           <a:p>
-            <a:pPr algn="ctr"/>
+            <a:pPr algn="ctr">
+              <a:defRPr/>
+            </a:pPr>
           </a:p>
         </p:txBody>
       </p:sp>
@@ -9690,7 +9861,9 @@
           <a:bodyPr rtlCol="0" anchor="ctr"/>
           <a:lstStyle/>
           <a:p>
-            <a:pPr algn="ctr"/>
+            <a:pPr algn="ctr">
+              <a:defRPr/>
+            </a:pPr>
           </a:p>
         </p:txBody>
       </p:sp>
@@ -9735,7 +9908,9 @@
           <a:bodyPr rtlCol="0" anchor="ctr"/>
           <a:lstStyle/>
           <a:p>
-            <a:pPr algn="ctr"/>
+            <a:pPr algn="ctr">
+              <a:defRPr/>
+            </a:pPr>
           </a:p>
         </p:txBody>
       </p:sp>
@@ -9770,10 +9945,12 @@
               </a:defRPr>
             </a:pPr>
             <a:r>
+              <a:rPr/>
               <a:t>自動化バイアス（Automation Bias）: AIが高い信頼度スコアを表示すると、</a:t>
             </a:r>
             <a:br/>
             <a:r>
+              <a:rPr/>
               <a:t>System 2による独立した検討を省略しやすくなる</a:t>
             </a:r>
           </a:p>
@@ -9810,6 +9987,7 @@
               </a:defRPr>
             </a:pPr>
             <a:r>
+              <a:rPr/>
               <a:t>Cabrera-Barona et al. (2024): マルチエージェントLLM会話による認知バイアス緩和の可能性</a:t>
             </a:r>
           </a:p>

--- a/output/education/2026-03-30_cognitive-bias-diagnostic-reasoning/cognitive-bias-diagnostic-reasoning_slides_residents.pptx
+++ b/output/education/2026-03-30_cognitive-bias-diagnostic-reasoning/cognitive-bias-diagnostic-reasoning_slides_residents.pptx
@@ -8007,7 +8007,7 @@
         <p:spPr>
           <a:xfrm>
             <a:off x="731520" y="868680"/>
-            <a:ext cx="2194560" cy="274320"/>
+            <a:ext cx="2194560" cy="340360"/>
           </a:xfrm>
           <a:prstGeom prst="rect">
             <a:avLst/>
@@ -8212,7 +8212,7 @@
         <p:spPr>
           <a:xfrm>
             <a:off x="3657600" y="868680"/>
-            <a:ext cx="2194560" cy="274320"/>
+            <a:ext cx="2194560" cy="340360"/>
           </a:xfrm>
           <a:prstGeom prst="rect">
             <a:avLst/>
@@ -8417,7 +8417,7 @@
         <p:spPr>
           <a:xfrm>
             <a:off x="6583680" y="868680"/>
-            <a:ext cx="2194560" cy="274320"/>
+            <a:ext cx="2194560" cy="340360"/>
           </a:xfrm>
           <a:prstGeom prst="rect">
             <a:avLst/>
